--- a/deck/namp-2026/out/2026_납품대금연동제_판별조사_2027승인연계_1p.pptx
+++ b/deck/namp-2026/out/2026_납품대금연동제_판별조사_2027승인연계_1p.pptx
@@ -4833,7 +4833,7 @@
       </p:sp>
       <p:pic>
         <p:nvPicPr>
-          <p:cNvPr id="136" name="Image 0" descr="/home/user/kstat-pm/deck/namp-2026/assets/s17-gavel.png">    </p:cNvPr>
+          <p:cNvPr id="136" name="Image 0" descr="s17-gavel">    </p:cNvPr>
           <p:cNvPicPr>
             <a:picLocks noChangeAspect="1"/>
           </p:cNvPicPr>
